--- a/문제해결프로그래밍_숙제/제출용/숙제3_2022182035.pptx
+++ b/문제해결프로그래밍_숙제/제출용/숙제3_2022182035.pptx
@@ -34803,6 +34803,96 @@
           </a:p>
         </p:txBody>
       </p:sp>
+      <p:pic>
+        <p:nvPicPr>
+          <p:cNvPr id="3" name="그림 2">
+            <a:extLst>
+              <a:ext uri="{FF2B5EF4-FFF2-40B4-BE49-F238E27FC236}">
+                <a16:creationId xmlns:a16="http://schemas.microsoft.com/office/drawing/2014/main" id="{305E61BC-ADBA-A25B-7F95-0B45321A8EFD}"/>
+              </a:ext>
+            </a:extLst>
+          </p:cNvPr>
+          <p:cNvPicPr>
+            <a:picLocks noChangeAspect="1"/>
+          </p:cNvPicPr>
+          <p:nvPr/>
+        </p:nvPicPr>
+        <p:blipFill>
+          <a:blip r:embed="rId3"/>
+          <a:stretch>
+            <a:fillRect/>
+          </a:stretch>
+        </p:blipFill>
+        <p:spPr>
+          <a:xfrm>
+            <a:off x="779005" y="1099635"/>
+            <a:ext cx="2265842" cy="3327164"/>
+          </a:xfrm>
+          <a:prstGeom prst="rect">
+            <a:avLst/>
+          </a:prstGeom>
+        </p:spPr>
+      </p:pic>
+      <p:pic>
+        <p:nvPicPr>
+          <p:cNvPr id="5" name="그림 4">
+            <a:extLst>
+              <a:ext uri="{FF2B5EF4-FFF2-40B4-BE49-F238E27FC236}">
+                <a16:creationId xmlns:a16="http://schemas.microsoft.com/office/drawing/2014/main" id="{C7B7EB56-1718-B13B-CD5A-F842583CCA47}"/>
+              </a:ext>
+            </a:extLst>
+          </p:cNvPr>
+          <p:cNvPicPr>
+            <a:picLocks noChangeAspect="1"/>
+          </p:cNvPicPr>
+          <p:nvPr/>
+        </p:nvPicPr>
+        <p:blipFill>
+          <a:blip r:embed="rId4"/>
+          <a:stretch>
+            <a:fillRect/>
+          </a:stretch>
+        </p:blipFill>
+        <p:spPr>
+          <a:xfrm>
+            <a:off x="3366849" y="1099635"/>
+            <a:ext cx="2410277" cy="2971800"/>
+          </a:xfrm>
+          <a:prstGeom prst="rect">
+            <a:avLst/>
+          </a:prstGeom>
+        </p:spPr>
+      </p:pic>
+      <p:pic>
+        <p:nvPicPr>
+          <p:cNvPr id="7" name="그림 6">
+            <a:extLst>
+              <a:ext uri="{FF2B5EF4-FFF2-40B4-BE49-F238E27FC236}">
+                <a16:creationId xmlns:a16="http://schemas.microsoft.com/office/drawing/2014/main" id="{04771272-AE52-4573-3AE9-F1D635D52C57}"/>
+              </a:ext>
+            </a:extLst>
+          </p:cNvPr>
+          <p:cNvPicPr>
+            <a:picLocks noChangeAspect="1"/>
+          </p:cNvPicPr>
+          <p:nvPr/>
+        </p:nvPicPr>
+        <p:blipFill>
+          <a:blip r:embed="rId5"/>
+          <a:stretch>
+            <a:fillRect/>
+          </a:stretch>
+        </p:blipFill>
+        <p:spPr>
+          <a:xfrm>
+            <a:off x="3366849" y="4235770"/>
+            <a:ext cx="5281520" cy="580564"/>
+          </a:xfrm>
+          <a:prstGeom prst="rect">
+            <a:avLst/>
+          </a:prstGeom>
+        </p:spPr>
+      </p:pic>
     </p:spTree>
     <p:extLst>
       <p:ext uri="{BB962C8B-B14F-4D97-AF65-F5344CB8AC3E}">

--- a/문제해결프로그래밍_숙제/제출용/숙제3_2022182035.pptx
+++ b/문제해결프로그래밍_숙제/제출용/숙제3_2022182035.pptx
@@ -34206,6 +34206,96 @@
           </a:p>
         </p:txBody>
       </p:sp>
+      <p:pic>
+        <p:nvPicPr>
+          <p:cNvPr id="3" name="그림 2">
+            <a:extLst>
+              <a:ext uri="{FF2B5EF4-FFF2-40B4-BE49-F238E27FC236}">
+                <a16:creationId xmlns:a16="http://schemas.microsoft.com/office/drawing/2014/main" id="{82597241-AA8A-B8F2-745B-9D564C42BA4B}"/>
+              </a:ext>
+            </a:extLst>
+          </p:cNvPr>
+          <p:cNvPicPr>
+            <a:picLocks noChangeAspect="1"/>
+          </p:cNvPicPr>
+          <p:nvPr/>
+        </p:nvPicPr>
+        <p:blipFill>
+          <a:blip r:embed="rId3"/>
+          <a:stretch>
+            <a:fillRect/>
+          </a:stretch>
+        </p:blipFill>
+        <p:spPr>
+          <a:xfrm>
+            <a:off x="508605" y="935300"/>
+            <a:ext cx="2234595" cy="3704499"/>
+          </a:xfrm>
+          <a:prstGeom prst="rect">
+            <a:avLst/>
+          </a:prstGeom>
+        </p:spPr>
+      </p:pic>
+      <p:pic>
+        <p:nvPicPr>
+          <p:cNvPr id="5" name="그림 4">
+            <a:extLst>
+              <a:ext uri="{FF2B5EF4-FFF2-40B4-BE49-F238E27FC236}">
+                <a16:creationId xmlns:a16="http://schemas.microsoft.com/office/drawing/2014/main" id="{0675B00F-D5C2-DCC0-F4F7-16A075799611}"/>
+              </a:ext>
+            </a:extLst>
+          </p:cNvPr>
+          <p:cNvPicPr>
+            <a:picLocks noChangeAspect="1"/>
+          </p:cNvPicPr>
+          <p:nvPr/>
+        </p:nvPicPr>
+        <p:blipFill>
+          <a:blip r:embed="rId4"/>
+          <a:stretch>
+            <a:fillRect/>
+          </a:stretch>
+        </p:blipFill>
+        <p:spPr>
+          <a:xfrm>
+            <a:off x="3057491" y="1462482"/>
+            <a:ext cx="2386430" cy="1950331"/>
+          </a:xfrm>
+          <a:prstGeom prst="rect">
+            <a:avLst/>
+          </a:prstGeom>
+        </p:spPr>
+      </p:pic>
+      <p:pic>
+        <p:nvPicPr>
+          <p:cNvPr id="7" name="그림 6">
+            <a:extLst>
+              <a:ext uri="{FF2B5EF4-FFF2-40B4-BE49-F238E27FC236}">
+                <a16:creationId xmlns:a16="http://schemas.microsoft.com/office/drawing/2014/main" id="{877753C5-C874-4E8D-4A78-1DCA620C2DFB}"/>
+              </a:ext>
+            </a:extLst>
+          </p:cNvPr>
+          <p:cNvPicPr>
+            <a:picLocks noChangeAspect="1"/>
+          </p:cNvPicPr>
+          <p:nvPr/>
+        </p:nvPicPr>
+        <p:blipFill>
+          <a:blip r:embed="rId5"/>
+          <a:stretch>
+            <a:fillRect/>
+          </a:stretch>
+        </p:blipFill>
+        <p:spPr>
+          <a:xfrm>
+            <a:off x="3057491" y="3901057"/>
+            <a:ext cx="5577904" cy="575592"/>
+          </a:xfrm>
+          <a:prstGeom prst="rect">
+            <a:avLst/>
+          </a:prstGeom>
+        </p:spPr>
+      </p:pic>
     </p:spTree>
   </p:cSld>
   <p:clrMapOvr>
@@ -34479,6 +34569,94 @@
           </a:p>
         </p:txBody>
       </p:sp>
+      <p:pic>
+        <p:nvPicPr>
+          <p:cNvPr id="3" name="그림 2">
+            <a:extLst>
+              <a:ext uri="{FF2B5EF4-FFF2-40B4-BE49-F238E27FC236}">
+                <a16:creationId xmlns:a16="http://schemas.microsoft.com/office/drawing/2014/main" id="{65B85DFB-CA51-EF7F-9BDC-B0AC405CA1E9}"/>
+              </a:ext>
+            </a:extLst>
+          </p:cNvPr>
+          <p:cNvPicPr>
+            <a:picLocks noChangeAspect="1"/>
+          </p:cNvPicPr>
+          <p:nvPr/>
+        </p:nvPicPr>
+        <p:blipFill>
+          <a:blip r:embed="rId3"/>
+          <a:srcRect r="8699" b="57216"/>
+          <a:stretch/>
+        </p:blipFill>
+        <p:spPr>
+          <a:xfrm>
+            <a:off x="554818" y="1578844"/>
+            <a:ext cx="2237427" cy="1985808"/>
+          </a:xfrm>
+          <a:prstGeom prst="rect">
+            <a:avLst/>
+          </a:prstGeom>
+        </p:spPr>
+      </p:pic>
+      <p:pic>
+        <p:nvPicPr>
+          <p:cNvPr id="4" name="그림 3">
+            <a:extLst>
+              <a:ext uri="{FF2B5EF4-FFF2-40B4-BE49-F238E27FC236}">
+                <a16:creationId xmlns:a16="http://schemas.microsoft.com/office/drawing/2014/main" id="{1066D7FD-492F-AEA5-3758-474B669E72A2}"/>
+              </a:ext>
+            </a:extLst>
+          </p:cNvPr>
+          <p:cNvPicPr>
+            <a:picLocks noChangeAspect="1"/>
+          </p:cNvPicPr>
+          <p:nvPr/>
+        </p:nvPicPr>
+        <p:blipFill>
+          <a:blip r:embed="rId3"/>
+          <a:srcRect t="42589" r="4858"/>
+          <a:stretch/>
+        </p:blipFill>
+        <p:spPr>
+          <a:xfrm>
+            <a:off x="2920030" y="1252588"/>
+            <a:ext cx="2308436" cy="2638321"/>
+          </a:xfrm>
+          <a:prstGeom prst="rect">
+            <a:avLst/>
+          </a:prstGeom>
+        </p:spPr>
+      </p:pic>
+      <p:pic>
+        <p:nvPicPr>
+          <p:cNvPr id="6" name="그림 5">
+            <a:extLst>
+              <a:ext uri="{FF2B5EF4-FFF2-40B4-BE49-F238E27FC236}">
+                <a16:creationId xmlns:a16="http://schemas.microsoft.com/office/drawing/2014/main" id="{317222F0-3185-D5CE-2DF7-B973E1DD21B4}"/>
+              </a:ext>
+            </a:extLst>
+          </p:cNvPr>
+          <p:cNvPicPr>
+            <a:picLocks noChangeAspect="1"/>
+          </p:cNvPicPr>
+          <p:nvPr/>
+        </p:nvPicPr>
+        <p:blipFill>
+          <a:blip r:embed="rId4"/>
+          <a:stretch>
+            <a:fillRect/>
+          </a:stretch>
+        </p:blipFill>
+        <p:spPr>
+          <a:xfrm>
+            <a:off x="5356251" y="1317903"/>
+            <a:ext cx="3366811" cy="2507693"/>
+          </a:xfrm>
+          <a:prstGeom prst="rect">
+            <a:avLst/>
+          </a:prstGeom>
+        </p:spPr>
+      </p:pic>
     </p:spTree>
     <p:extLst>
       <p:ext uri="{BB962C8B-B14F-4D97-AF65-F5344CB8AC3E}">

--- a/문제해결프로그래밍_숙제/제출용/숙제3_2022182035.pptx
+++ b/문제해결프로그래밍_숙제/제출용/숙제3_2022182035.pptx
@@ -34873,6 +34873,66 @@
           </a:p>
         </p:txBody>
       </p:sp>
+      <p:pic>
+        <p:nvPicPr>
+          <p:cNvPr id="3" name="그림 2">
+            <a:extLst>
+              <a:ext uri="{FF2B5EF4-FFF2-40B4-BE49-F238E27FC236}">
+                <a16:creationId xmlns:a16="http://schemas.microsoft.com/office/drawing/2014/main" id="{B171B698-E71E-42AA-A2A8-B9160B2D8036}"/>
+              </a:ext>
+            </a:extLst>
+          </p:cNvPr>
+          <p:cNvPicPr>
+            <a:picLocks noChangeAspect="1"/>
+          </p:cNvPicPr>
+          <p:nvPr/>
+        </p:nvPicPr>
+        <p:blipFill>
+          <a:blip r:embed="rId3"/>
+          <a:stretch>
+            <a:fillRect/>
+          </a:stretch>
+        </p:blipFill>
+        <p:spPr>
+          <a:xfrm>
+            <a:off x="722388" y="1036864"/>
+            <a:ext cx="3229883" cy="3829050"/>
+          </a:xfrm>
+          <a:prstGeom prst="rect">
+            <a:avLst/>
+          </a:prstGeom>
+        </p:spPr>
+      </p:pic>
+      <p:pic>
+        <p:nvPicPr>
+          <p:cNvPr id="5" name="그림 4">
+            <a:extLst>
+              <a:ext uri="{FF2B5EF4-FFF2-40B4-BE49-F238E27FC236}">
+                <a16:creationId xmlns:a16="http://schemas.microsoft.com/office/drawing/2014/main" id="{DE59C112-B08C-70DB-5FD4-4E36F4EAD42B}"/>
+              </a:ext>
+            </a:extLst>
+          </p:cNvPr>
+          <p:cNvPicPr>
+            <a:picLocks noChangeAspect="1"/>
+          </p:cNvPicPr>
+          <p:nvPr/>
+        </p:nvPicPr>
+        <p:blipFill>
+          <a:blip r:embed="rId4"/>
+          <a:stretch>
+            <a:fillRect/>
+          </a:stretch>
+        </p:blipFill>
+        <p:spPr>
+          <a:xfrm>
+            <a:off x="4233767" y="1424667"/>
+            <a:ext cx="4187821" cy="3043556"/>
+          </a:xfrm>
+          <a:prstGeom prst="rect">
+            <a:avLst/>
+          </a:prstGeom>
+        </p:spPr>
+      </p:pic>
     </p:spTree>
     <p:extLst>
       <p:ext uri="{BB962C8B-B14F-4D97-AF65-F5344CB8AC3E}">
@@ -35179,6 +35239,66 @@
           </a:p>
         </p:txBody>
       </p:sp>
+      <p:pic>
+        <p:nvPicPr>
+          <p:cNvPr id="3" name="그림 2">
+            <a:extLst>
+              <a:ext uri="{FF2B5EF4-FFF2-40B4-BE49-F238E27FC236}">
+                <a16:creationId xmlns:a16="http://schemas.microsoft.com/office/drawing/2014/main" id="{51EF1305-9D8E-9B5F-DCCE-C4CA50B7AB2D}"/>
+              </a:ext>
+            </a:extLst>
+          </p:cNvPr>
+          <p:cNvPicPr>
+            <a:picLocks noChangeAspect="1"/>
+          </p:cNvPicPr>
+          <p:nvPr/>
+        </p:nvPicPr>
+        <p:blipFill>
+          <a:blip r:embed="rId3"/>
+          <a:stretch>
+            <a:fillRect/>
+          </a:stretch>
+        </p:blipFill>
+        <p:spPr>
+          <a:xfrm>
+            <a:off x="1030429" y="935298"/>
+            <a:ext cx="2927394" cy="3845600"/>
+          </a:xfrm>
+          <a:prstGeom prst="rect">
+            <a:avLst/>
+          </a:prstGeom>
+        </p:spPr>
+      </p:pic>
+      <p:pic>
+        <p:nvPicPr>
+          <p:cNvPr id="5" name="그림 4">
+            <a:extLst>
+              <a:ext uri="{FF2B5EF4-FFF2-40B4-BE49-F238E27FC236}">
+                <a16:creationId xmlns:a16="http://schemas.microsoft.com/office/drawing/2014/main" id="{D1DBD29B-37BF-89B8-E3BE-55788B193E72}"/>
+              </a:ext>
+            </a:extLst>
+          </p:cNvPr>
+          <p:cNvPicPr>
+            <a:picLocks noChangeAspect="1"/>
+          </p:cNvPicPr>
+          <p:nvPr/>
+        </p:nvPicPr>
+        <p:blipFill>
+          <a:blip r:embed="rId4"/>
+          <a:stretch>
+            <a:fillRect/>
+          </a:stretch>
+        </p:blipFill>
+        <p:spPr>
+          <a:xfrm>
+            <a:off x="4077242" y="1588715"/>
+            <a:ext cx="4224927" cy="2538767"/>
+          </a:xfrm>
+          <a:prstGeom prst="rect">
+            <a:avLst/>
+          </a:prstGeom>
+        </p:spPr>
+      </p:pic>
     </p:spTree>
     <p:extLst>
       <p:ext uri="{BB962C8B-B14F-4D97-AF65-F5344CB8AC3E}">

--- a/문제해결프로그래밍_숙제/제출용/숙제3_2022182035.pptx
+++ b/문제해결프로그래밍_숙제/제출용/숙제3_2022182035.pptx
@@ -34749,6 +34749,97 @@
           </a:p>
         </p:txBody>
       </p:sp>
+      <p:pic>
+        <p:nvPicPr>
+          <p:cNvPr id="3" name="그림 2">
+            <a:extLst>
+              <a:ext uri="{FF2B5EF4-FFF2-40B4-BE49-F238E27FC236}">
+                <a16:creationId xmlns:a16="http://schemas.microsoft.com/office/drawing/2014/main" id="{1DC4F084-9047-B160-4BB4-4470B38E324C}"/>
+              </a:ext>
+            </a:extLst>
+          </p:cNvPr>
+          <p:cNvPicPr>
+            <a:picLocks noChangeAspect="1"/>
+          </p:cNvPicPr>
+          <p:nvPr/>
+        </p:nvPicPr>
+        <p:blipFill>
+          <a:blip r:embed="rId3"/>
+          <a:srcRect r="16499"/>
+          <a:stretch>
+            <a:fillRect/>
+          </a:stretch>
+        </p:blipFill>
+        <p:spPr>
+          <a:xfrm>
+            <a:off x="260109" y="1327150"/>
+            <a:ext cx="3045848" cy="2772094"/>
+          </a:xfrm>
+          <a:prstGeom prst="rect">
+            <a:avLst/>
+          </a:prstGeom>
+        </p:spPr>
+      </p:pic>
+      <p:pic>
+        <p:nvPicPr>
+          <p:cNvPr id="5" name="그림 4">
+            <a:extLst>
+              <a:ext uri="{FF2B5EF4-FFF2-40B4-BE49-F238E27FC236}">
+                <a16:creationId xmlns:a16="http://schemas.microsoft.com/office/drawing/2014/main" id="{FF54A640-28DE-C1C1-2F06-571F41CB894D}"/>
+              </a:ext>
+            </a:extLst>
+          </p:cNvPr>
+          <p:cNvPicPr>
+            <a:picLocks noChangeAspect="1"/>
+          </p:cNvPicPr>
+          <p:nvPr/>
+        </p:nvPicPr>
+        <p:blipFill>
+          <a:blip r:embed="rId4"/>
+          <a:stretch>
+            <a:fillRect/>
+          </a:stretch>
+        </p:blipFill>
+        <p:spPr>
+          <a:xfrm>
+            <a:off x="3353658" y="1327150"/>
+            <a:ext cx="2783424" cy="2772094"/>
+          </a:xfrm>
+          <a:prstGeom prst="rect">
+            <a:avLst/>
+          </a:prstGeom>
+        </p:spPr>
+      </p:pic>
+      <p:pic>
+        <p:nvPicPr>
+          <p:cNvPr id="7" name="그림 6">
+            <a:extLst>
+              <a:ext uri="{FF2B5EF4-FFF2-40B4-BE49-F238E27FC236}">
+                <a16:creationId xmlns:a16="http://schemas.microsoft.com/office/drawing/2014/main" id="{43E91F5D-7954-22FA-94BD-7256433FDD02}"/>
+              </a:ext>
+            </a:extLst>
+          </p:cNvPr>
+          <p:cNvPicPr>
+            <a:picLocks noChangeAspect="1"/>
+          </p:cNvPicPr>
+          <p:nvPr/>
+        </p:nvPicPr>
+        <p:blipFill>
+          <a:blip r:embed="rId5"/>
+          <a:stretch>
+            <a:fillRect/>
+          </a:stretch>
+        </p:blipFill>
+        <p:spPr>
+          <a:xfrm>
+            <a:off x="6184783" y="2045812"/>
+            <a:ext cx="2699108" cy="1334770"/>
+          </a:xfrm>
+          <a:prstGeom prst="rect">
+            <a:avLst/>
+          </a:prstGeom>
+        </p:spPr>
+      </p:pic>
     </p:spTree>
     <p:extLst>
       <p:ext uri="{BB962C8B-B14F-4D97-AF65-F5344CB8AC3E}">
